--- a/docs/images/One-Slide-Lightning-Talk-Template.pptx
+++ b/docs/images/One-Slide-Lightning-Talk-Template.pptx
@@ -5,13 +5,14 @@
     <p:sldMasterId id="2147483648" r:id="rId1"/>
   </p:sldMasterIdLst>
   <p:notesMasterIdLst>
-    <p:notesMasterId r:id="rId6"/>
+    <p:notesMasterId r:id="rId7"/>
   </p:notesMasterIdLst>
   <p:sldIdLst>
     <p:sldId id="256" r:id="rId2"/>
     <p:sldId id="257" r:id="rId3"/>
     <p:sldId id="258" r:id="rId4"/>
     <p:sldId id="259" r:id="rId5"/>
+    <p:sldId id="260" r:id="rId6"/>
   </p:sldIdLst>
   <p:sldSz cx="12192000" cy="6858000"/>
   <p:notesSz cx="6858000" cy="12192000"/>
@@ -2299,6 +2300,114 @@
 </p:notes>
 </file>
 
+<file path=ppt/notesSlides/notesSlide5.xml><?xml version="1.0" encoding="utf-8"?>
+<p:notes xmlns:a="http://schemas.openxmlformats.org/drawingml/2006/main" xmlns:r="http://schemas.openxmlformats.org/officeDocument/2006/relationships" xmlns:p="http://schemas.openxmlformats.org/presentationml/2006/main">
+  <p:cSld>
+    <p:spTree>
+      <p:nvGrpSpPr>
+        <p:cNvPr id="1" name="">
+          <a:extLst>
+            <a:ext uri="{FF2B5EF4-FFF2-40B4-BE49-F238E27FC236}">
+              <a16:creationId xmlns:a16="http://schemas.microsoft.com/office/drawing/2014/main" id="{0F14F18E-C719-F295-53C7-464ED59286A5}"/>
+            </a:ext>
+          </a:extLst>
+        </p:cNvPr>
+        <p:cNvGrpSpPr/>
+        <p:nvPr/>
+      </p:nvGrpSpPr>
+      <p:grpSpPr>
+        <a:xfrm>
+          <a:off x="0" y="0"/>
+          <a:ext cx="0" cy="0"/>
+          <a:chOff x="0" y="0"/>
+          <a:chExt cx="0" cy="0"/>
+        </a:xfrm>
+      </p:grpSpPr>
+      <p:sp>
+        <p:nvSpPr>
+          <p:cNvPr id="2" name="Slide Image Placeholder 1">
+            <a:extLst>
+              <a:ext uri="{FF2B5EF4-FFF2-40B4-BE49-F238E27FC236}">
+                <a16:creationId xmlns:a16="http://schemas.microsoft.com/office/drawing/2014/main" id="{A0E19135-47CF-C2CA-13D9-A3C223D899D2}"/>
+              </a:ext>
+            </a:extLst>
+          </p:cNvPr>
+          <p:cNvSpPr>
+            <a:spLocks noGrp="1" noRot="1" noChangeAspect="1"/>
+          </p:cNvSpPr>
+          <p:nvPr>
+            <p:ph type="sldImg"/>
+          </p:nvPr>
+        </p:nvSpPr>
+        <p:spPr/>
+      </p:sp>
+      <p:sp>
+        <p:nvSpPr>
+          <p:cNvPr id="3" name="Notes Placeholder 2">
+            <a:extLst>
+              <a:ext uri="{FF2B5EF4-FFF2-40B4-BE49-F238E27FC236}">
+                <a16:creationId xmlns:a16="http://schemas.microsoft.com/office/drawing/2014/main" id="{2BA9ABD7-0573-C29C-C3D9-7FC8A746755F}"/>
+              </a:ext>
+            </a:extLst>
+          </p:cNvPr>
+          <p:cNvSpPr>
+            <a:spLocks noGrp="1"/>
+          </p:cNvSpPr>
+          <p:nvPr>
+            <p:ph type="body" idx="1"/>
+          </p:nvPr>
+        </p:nvSpPr>
+        <p:spPr/>
+        <p:txBody>
+          <a:bodyPr/>
+          <a:lstStyle/>
+          <a:p>
+            <a:endParaRPr lang="en-US" dirty="0"/>
+          </a:p>
+        </p:txBody>
+      </p:sp>
+      <p:sp>
+        <p:nvSpPr>
+          <p:cNvPr id="4" name="Slide Number Placeholder 3">
+            <a:extLst>
+              <a:ext uri="{FF2B5EF4-FFF2-40B4-BE49-F238E27FC236}">
+                <a16:creationId xmlns:a16="http://schemas.microsoft.com/office/drawing/2014/main" id="{B2EFE6E8-94CD-E05E-6D77-69E31ACB83A7}"/>
+              </a:ext>
+            </a:extLst>
+          </p:cNvPr>
+          <p:cNvSpPr>
+            <a:spLocks noGrp="1"/>
+          </p:cNvSpPr>
+          <p:nvPr>
+            <p:ph type="sldNum" sz="quarter" idx="10"/>
+          </p:nvPr>
+        </p:nvSpPr>
+        <p:spPr/>
+        <p:txBody>
+          <a:bodyPr/>
+          <a:lstStyle/>
+          <a:p>
+            <a:fld id="{F7021451-1387-4CA6-816F-3879F97B5CBC}" type="slidenum">
+              <a:rPr lang="en-US"/>
+              <a:t>5</a:t>
+            </a:fld>
+            <a:endParaRPr lang="en-US"/>
+          </a:p>
+        </p:txBody>
+      </p:sp>
+    </p:spTree>
+    <p:extLst>
+      <p:ext uri="{BB962C8B-B14F-4D97-AF65-F5344CB8AC3E}">
+        <p14:creationId xmlns:p14="http://schemas.microsoft.com/office/powerpoint/2010/main" val="3638612312"/>
+      </p:ext>
+    </p:extLst>
+  </p:cSld>
+  <p:clrMapOvr>
+    <a:masterClrMapping/>
+  </p:clrMapOvr>
+</p:notes>
+</file>
+
 <file path=ppt/slideLayouts/slideLayout1.xml><?xml version="1.0" encoding="utf-8"?>
 <p:sldLayout xmlns:a="http://schemas.openxmlformats.org/drawingml/2006/main" xmlns:r="http://schemas.openxmlformats.org/officeDocument/2006/relationships" xmlns:p="http://schemas.openxmlformats.org/presentationml/2006/main" preserve="1">
   <p:cSld name="DEFAULT">
@@ -9024,6 +9133,150 @@
         </p:txBody>
       </p:sp>
     </p:spTree>
+  </p:cSld>
+  <p:clrMapOvr>
+    <a:masterClrMapping/>
+  </p:clrMapOvr>
+</p:sld>
+</file>
+
+<file path=ppt/slides/slide5.xml><?xml version="1.0" encoding="utf-8"?>
+<p:sld xmlns:a="http://schemas.openxmlformats.org/drawingml/2006/main" xmlns:r="http://schemas.openxmlformats.org/officeDocument/2006/relationships" xmlns:p="http://schemas.openxmlformats.org/presentationml/2006/main">
+  <p:cSld>
+    <p:spTree>
+      <p:nvGrpSpPr>
+        <p:cNvPr id="1" name="">
+          <a:extLst>
+            <a:ext uri="{FF2B5EF4-FFF2-40B4-BE49-F238E27FC236}">
+              <a16:creationId xmlns:a16="http://schemas.microsoft.com/office/drawing/2014/main" id="{25421566-B99F-019E-D448-88551E37D96E}"/>
+            </a:ext>
+          </a:extLst>
+        </p:cNvPr>
+        <p:cNvGrpSpPr/>
+        <p:nvPr/>
+      </p:nvGrpSpPr>
+      <p:grpSpPr>
+        <a:xfrm>
+          <a:off x="0" y="0"/>
+          <a:ext cx="0" cy="0"/>
+          <a:chOff x="0" y="0"/>
+          <a:chExt cx="0" cy="0"/>
+        </a:xfrm>
+      </p:grpSpPr>
+      <p:sp>
+        <p:nvSpPr>
+          <p:cNvPr id="3" name="Text 1">
+            <a:extLst>
+              <a:ext uri="{FF2B5EF4-FFF2-40B4-BE49-F238E27FC236}">
+                <a16:creationId xmlns:a16="http://schemas.microsoft.com/office/drawing/2014/main" id="{E05225C5-2E65-4D9F-9D94-B58C188F5ECE}"/>
+              </a:ext>
+            </a:extLst>
+          </p:cNvPr>
+          <p:cNvSpPr txBox="1"/>
+          <p:nvPr/>
+        </p:nvSpPr>
+        <p:spPr>
+          <a:xfrm>
+            <a:off x="457200" y="566928"/>
+            <a:ext cx="11277295" cy="566928"/>
+          </a:xfrm>
+          <a:prstGeom prst="rect">
+            <a:avLst/>
+          </a:prstGeom>
+          <a:noFill/>
+          <a:ln/>
+        </p:spPr>
+        <p:txBody>
+          <a:bodyPr wrap="square" lIns="0" tIns="0" rIns="0" bIns="0" rtlCol="0" anchor="ctr"/>
+          <a:lstStyle/>
+          <a:p>
+            <a:pPr marL="0" indent="0">
+              <a:buNone/>
+            </a:pPr>
+            <a:r>
+              <a:rPr lang="en-US" sz="3200" b="1" dirty="0">
+                <a:latin typeface="Cambria" pitchFamily="34" charset="0"/>
+                <a:ea typeface="Cambria" pitchFamily="34" charset="-122"/>
+                <a:cs typeface="Cambria" pitchFamily="34" charset="-120"/>
+              </a:rPr>
+              <a:t>Disclosure statement</a:t>
+            </a:r>
+            <a:endParaRPr lang="en-US" sz="3200" dirty="0"/>
+          </a:p>
+        </p:txBody>
+      </p:sp>
+      <p:sp>
+        <p:nvSpPr>
+          <p:cNvPr id="8" name="Text 6">
+            <a:extLst>
+              <a:ext uri="{FF2B5EF4-FFF2-40B4-BE49-F238E27FC236}">
+                <a16:creationId xmlns:a16="http://schemas.microsoft.com/office/drawing/2014/main" id="{51E4649A-3A35-2F49-C5C0-478D9D54EC74}"/>
+              </a:ext>
+            </a:extLst>
+          </p:cNvPr>
+          <p:cNvSpPr txBox="1"/>
+          <p:nvPr/>
+        </p:nvSpPr>
+        <p:spPr>
+          <a:xfrm>
+            <a:off x="457200" y="1554054"/>
+            <a:ext cx="10614314" cy="3038727"/>
+          </a:xfrm>
+          <a:prstGeom prst="rect">
+            <a:avLst/>
+          </a:prstGeom>
+          <a:noFill/>
+          <a:ln/>
+        </p:spPr>
+        <p:txBody>
+          <a:bodyPr wrap="square" lIns="0" tIns="0" rIns="0" bIns="0" rtlCol="0" anchor="t"/>
+          <a:lstStyle/>
+          <a:p>
+            <a:pPr>
+              <a:lnSpc>
+                <a:spcPct val="114000"/>
+              </a:lnSpc>
+            </a:pPr>
+            <a:r>
+              <a:rPr lang="en-US" sz="1150" dirty="0">
+                <a:latin typeface="Calibri" pitchFamily="34" charset="0"/>
+                <a:ea typeface="Calibri" pitchFamily="34" charset="-122"/>
+                <a:cs typeface="Calibri" pitchFamily="34" charset="-120"/>
+              </a:rPr>
+              <a:t>To create this lightning talk template file, the Physics 50 teaching team fabricated experimental data and used generative AI to create the initial file. We iterated on that initial file in several subsequent revisions and instructor meetings to create the template for your use in Physics 50. </a:t>
+            </a:r>
+          </a:p>
+          <a:p>
+            <a:pPr>
+              <a:lnSpc>
+                <a:spcPct val="114000"/>
+              </a:lnSpc>
+            </a:pPr>
+            <a:endParaRPr lang="en-US" sz="1150" dirty="0">
+              <a:latin typeface="Calibri" pitchFamily="34" charset="0"/>
+              <a:ea typeface="Calibri" pitchFamily="34" charset="-122"/>
+              <a:cs typeface="Calibri" pitchFamily="34" charset="-120"/>
+            </a:endParaRPr>
+          </a:p>
+          <a:p>
+            <a:pPr>
+              <a:lnSpc>
+                <a:spcPct val="100000"/>
+              </a:lnSpc>
+            </a:pPr>
+            <a:r>
+              <a:rPr lang="en-US" sz="1150" dirty="0"/>
+              <a:t>We acknowledge that it may seem unfair for us to use generative AI in developing this template to help you prepare for your oral report, while prohibiting you from using AI to assist you to analyze your data and understand your experiment. On careful reflection, we hope you will recognize that a key learning goal of this course is to teach you to analyze data and judge results carefully and that you will not develop this skill by outsourcing that judgment to AI. In providing you these templates, our goal is to give you a tool to focus on course content and not spend time on the formatting of your presentation. </a:t>
+            </a:r>
+          </a:p>
+        </p:txBody>
+      </p:sp>
+    </p:spTree>
+    <p:extLst>
+      <p:ext uri="{BB962C8B-B14F-4D97-AF65-F5344CB8AC3E}">
+        <p14:creationId xmlns:p14="http://schemas.microsoft.com/office/powerpoint/2010/main" val="977494251"/>
+      </p:ext>
+    </p:extLst>
   </p:cSld>
   <p:clrMapOvr>
     <a:masterClrMapping/>
